--- a/presentations/b01-transformation-arc/B01_Transformation_Arc_Narrated.pptx
+++ b/presentations/b01-transformation-arc/B01_Transformation_Arc_Narrated.pptx
@@ -191,7 +191,7 @@
     </p:spTree>
     <p:extLst>
       <p:ext uri="{BB962C8B-B14F-4D97-AF65-F5344CB8AC3E}">
-        <p14:creationId xmlns:p14="http://schemas.microsoft.com/office/powerpoint/2010/main" val="1271105435"/>
+        <p14:creationId xmlns:p14="http://schemas.microsoft.com/office/powerpoint/2010/main" val="3601068580"/>
       </p:ext>
     </p:extLst>
   </p:cSld>
@@ -2711,7 +2711,7 @@
             <a:hlinkClick r:id="" action="ppaction://media"/>
             <a:extLst>
               <a:ext uri="{FF2B5EF4-FFF2-40B4-BE49-F238E27FC236}">
-                <a16:creationId xmlns:a16="http://schemas.microsoft.com/office/drawing/2014/main" id="{1CDB2765-C013-AE71-C9F3-B2F94A2DF11A}"/>
+                <a16:creationId xmlns:a16="http://schemas.microsoft.com/office/drawing/2014/main" id="{C230D21A-A2BB-2928-E38A-5036F0606851}"/>
               </a:ext>
             </a:extLst>
           </p:cNvPr>
@@ -2727,7 +2727,7 @@
                     <p:ext uri="{3AFAAA56-56D3-431D-BCD4-E75A35582382}">
                       <p173:tracksInfo xmlns:p173="http://schemas.microsoft.com/office/powerpoint/2017/3/main" displayLoc="slide">
                         <p173:trackLst>
-                          <p173:track id="{DA3E3D41-7312-47C1-837E-A344036C036B}" label="English (captions)" lang="en-US" r:embed="rId6"/>
+                          <p173:track id="{EF2F7768-1876-437D-9DF9-F0D2A213ADD6}" label="English (captions)" lang="en-US" r:embed="rId6"/>
                         </p173:trackLst>
                       </p173:tracksInfo>
                     </p:ext>
@@ -2745,7 +2745,7 @@
         </p:blipFill>
         <p:spPr>
           <a:xfrm>
-            <a:off x="127000" y="6350000"/>
+            <a:off x="12446000" y="127000"/>
             <a:ext cx="304800" cy="304800"/>
           </a:xfrm>
           <a:prstGeom prst="rect">
@@ -4608,7 +4608,7 @@
             <a:hlinkClick r:id="" action="ppaction://media"/>
             <a:extLst>
               <a:ext uri="{FF2B5EF4-FFF2-40B4-BE49-F238E27FC236}">
-                <a16:creationId xmlns:a16="http://schemas.microsoft.com/office/drawing/2014/main" id="{02913FE3-E046-CF01-A577-6187769DC5CC}"/>
+                <a16:creationId xmlns:a16="http://schemas.microsoft.com/office/drawing/2014/main" id="{FFB8340D-2E8D-2D83-82EE-881C905CEF6E}"/>
               </a:ext>
             </a:extLst>
           </p:cNvPr>
@@ -4624,7 +4624,7 @@
                     <p:ext uri="{3AFAAA56-56D3-431D-BCD4-E75A35582382}">
                       <p173:tracksInfo xmlns:p173="http://schemas.microsoft.com/office/powerpoint/2017/3/main" displayLoc="slide">
                         <p173:trackLst>
-                          <p173:track id="{5C7CF43B-AF60-4D8D-8ED0-41772C64A818}" label="English (captions)" lang="en-US" r:embed="rId8"/>
+                          <p173:track id="{24F716EF-D985-4C1E-95BB-A9F0E69034B7}" label="English (captions)" lang="en-US" r:embed="rId8"/>
                         </p173:trackLst>
                       </p173:tracksInfo>
                     </p:ext>
@@ -4642,7 +4642,7 @@
         </p:blipFill>
         <p:spPr>
           <a:xfrm>
-            <a:off x="127000" y="6350000"/>
+            <a:off x="12446000" y="127000"/>
             <a:ext cx="304800" cy="304800"/>
           </a:xfrm>
           <a:prstGeom prst="rect">
@@ -5923,7 +5923,7 @@
             <a:hlinkClick r:id="" action="ppaction://media"/>
             <a:extLst>
               <a:ext uri="{FF2B5EF4-FFF2-40B4-BE49-F238E27FC236}">
-                <a16:creationId xmlns:a16="http://schemas.microsoft.com/office/drawing/2014/main" id="{D7F4154D-CCED-4A5B-BF06-FCAF9A1787CD}"/>
+                <a16:creationId xmlns:a16="http://schemas.microsoft.com/office/drawing/2014/main" id="{B03F21FD-D96D-76D7-0F21-A5CF48AC96B4}"/>
               </a:ext>
             </a:extLst>
           </p:cNvPr>
@@ -5939,7 +5939,7 @@
                     <p:ext uri="{3AFAAA56-56D3-431D-BCD4-E75A35582382}">
                       <p173:tracksInfo xmlns:p173="http://schemas.microsoft.com/office/powerpoint/2017/3/main" displayLoc="slide">
                         <p173:trackLst>
-                          <p173:track id="{D4EF35E7-9E3F-4A48-A288-B71628970905}" label="English (captions)" lang="en-US" r:embed="rId9"/>
+                          <p173:track id="{1B4300C6-199F-459A-8165-B782E85E42C6}" label="English (captions)" lang="en-US" r:embed="rId9"/>
                         </p173:trackLst>
                       </p173:tracksInfo>
                     </p:ext>
@@ -5957,7 +5957,7 @@
         </p:blipFill>
         <p:spPr>
           <a:xfrm>
-            <a:off x="127000" y="6350000"/>
+            <a:off x="12446000" y="127000"/>
             <a:ext cx="304800" cy="304800"/>
           </a:xfrm>
           <a:prstGeom prst="rect">
@@ -7345,7 +7345,7 @@
             <a:hlinkClick r:id="" action="ppaction://media"/>
             <a:extLst>
               <a:ext uri="{FF2B5EF4-FFF2-40B4-BE49-F238E27FC236}">
-                <a16:creationId xmlns:a16="http://schemas.microsoft.com/office/drawing/2014/main" id="{4C9D528C-5BFC-7651-5EB5-38C37CEE6CEA}"/>
+                <a16:creationId xmlns:a16="http://schemas.microsoft.com/office/drawing/2014/main" id="{F9DDA809-7CD5-06F7-5223-65DE4BC11C1D}"/>
               </a:ext>
             </a:extLst>
           </p:cNvPr>
@@ -7361,7 +7361,7 @@
                     <p:ext uri="{3AFAAA56-56D3-431D-BCD4-E75A35582382}">
                       <p173:tracksInfo xmlns:p173="http://schemas.microsoft.com/office/powerpoint/2017/3/main" displayLoc="slide">
                         <p173:trackLst>
-                          <p173:track id="{B64C1837-249A-4773-A8B3-6C219FDFE3CE}" label="English (captions)" lang="en-US" r:embed="rId9"/>
+                          <p173:track id="{0FFEE47F-3F80-40D5-8139-AFD1D1A22511}" label="English (captions)" lang="en-US" r:embed="rId9"/>
                         </p173:trackLst>
                       </p173:tracksInfo>
                     </p:ext>
@@ -7379,7 +7379,7 @@
         </p:blipFill>
         <p:spPr>
           <a:xfrm>
-            <a:off x="127000" y="6350000"/>
+            <a:off x="12446000" y="127000"/>
             <a:ext cx="304800" cy="304800"/>
           </a:xfrm>
           <a:prstGeom prst="rect">
@@ -8516,7 +8516,7 @@
             <a:hlinkClick r:id="" action="ppaction://media"/>
             <a:extLst>
               <a:ext uri="{FF2B5EF4-FFF2-40B4-BE49-F238E27FC236}">
-                <a16:creationId xmlns:a16="http://schemas.microsoft.com/office/drawing/2014/main" id="{C37995E8-965B-F753-1DDC-9DF6111ADCF2}"/>
+                <a16:creationId xmlns:a16="http://schemas.microsoft.com/office/drawing/2014/main" id="{8E1C5B56-4E6C-FF4B-5AF1-5A04E1E9C386}"/>
               </a:ext>
             </a:extLst>
           </p:cNvPr>
@@ -8532,7 +8532,7 @@
                     <p:ext uri="{3AFAAA56-56D3-431D-BCD4-E75A35582382}">
                       <p173:tracksInfo xmlns:p173="http://schemas.microsoft.com/office/powerpoint/2017/3/main" displayLoc="slide">
                         <p173:trackLst>
-                          <p173:track id="{27DAD68C-871A-45A2-A89D-990F81610C3D}" label="English (captions)" lang="en-US" r:embed="rId10"/>
+                          <p173:track id="{8F7FAB71-7D4E-41F1-BE35-E17C6B680167}" label="English (captions)" lang="en-US" r:embed="rId10"/>
                         </p173:trackLst>
                       </p173:tracksInfo>
                     </p:ext>
@@ -8550,7 +8550,7 @@
         </p:blipFill>
         <p:spPr>
           <a:xfrm>
-            <a:off x="127000" y="6350000"/>
+            <a:off x="12446000" y="127000"/>
             <a:ext cx="304800" cy="304800"/>
           </a:xfrm>
           <a:prstGeom prst="rect">
@@ -9791,7 +9791,7 @@
             <a:hlinkClick r:id="" action="ppaction://media"/>
             <a:extLst>
               <a:ext uri="{FF2B5EF4-FFF2-40B4-BE49-F238E27FC236}">
-                <a16:creationId xmlns:a16="http://schemas.microsoft.com/office/drawing/2014/main" id="{313BC055-1DCE-5B8D-09C1-965CA10C4D87}"/>
+                <a16:creationId xmlns:a16="http://schemas.microsoft.com/office/drawing/2014/main" id="{2B46E2AD-8E1F-E617-1530-2DC324818B9E}"/>
               </a:ext>
             </a:extLst>
           </p:cNvPr>
@@ -9807,7 +9807,7 @@
                     <p:ext uri="{3AFAAA56-56D3-431D-BCD4-E75A35582382}">
                       <p173:tracksInfo xmlns:p173="http://schemas.microsoft.com/office/powerpoint/2017/3/main" displayLoc="slide">
                         <p173:trackLst>
-                          <p173:track id="{911129D3-F8A4-44E1-964F-093F97A53C98}" label="English (captions)" lang="en-US" r:embed="rId8"/>
+                          <p173:track id="{E4A174BB-5EB7-4152-985B-44B30BAED58E}" label="English (captions)" lang="en-US" r:embed="rId8"/>
                         </p173:trackLst>
                       </p173:tracksInfo>
                     </p:ext>
@@ -9825,7 +9825,7 @@
         </p:blipFill>
         <p:spPr>
           <a:xfrm>
-            <a:off x="127000" y="6350000"/>
+            <a:off x="12446000" y="127000"/>
             <a:ext cx="304800" cy="304800"/>
           </a:xfrm>
           <a:prstGeom prst="rect">
@@ -11607,7 +11607,7 @@
             <a:hlinkClick r:id="" action="ppaction://media"/>
             <a:extLst>
               <a:ext uri="{FF2B5EF4-FFF2-40B4-BE49-F238E27FC236}">
-                <a16:creationId xmlns:a16="http://schemas.microsoft.com/office/drawing/2014/main" id="{FDF7D839-E552-2554-A867-0928A92BCE62}"/>
+                <a16:creationId xmlns:a16="http://schemas.microsoft.com/office/drawing/2014/main" id="{837FD88F-9CE8-3401-3E60-EDB8869ADAA8}"/>
               </a:ext>
             </a:extLst>
           </p:cNvPr>
@@ -11623,7 +11623,7 @@
                     <p:ext uri="{3AFAAA56-56D3-431D-BCD4-E75A35582382}">
                       <p173:tracksInfo xmlns:p173="http://schemas.microsoft.com/office/powerpoint/2017/3/main" displayLoc="slide">
                         <p173:trackLst>
-                          <p173:track id="{C6976A57-033A-43C2-B2E5-C617BB1B49E5}" label="English (captions)" lang="en-US" r:embed="rId7"/>
+                          <p173:track id="{2F705221-B097-414C-A9F5-CFFE04005B0F}" label="English (captions)" lang="en-US" r:embed="rId7"/>
                         </p173:trackLst>
                       </p173:tracksInfo>
                     </p:ext>
@@ -11641,7 +11641,7 @@
         </p:blipFill>
         <p:spPr>
           <a:xfrm>
-            <a:off x="127000" y="6350000"/>
+            <a:off x="12446000" y="127000"/>
             <a:ext cx="304800" cy="304800"/>
           </a:xfrm>
           <a:prstGeom prst="rect">
@@ -12710,7 +12710,7 @@
             <a:hlinkClick r:id="" action="ppaction://media"/>
             <a:extLst>
               <a:ext uri="{FF2B5EF4-FFF2-40B4-BE49-F238E27FC236}">
-                <a16:creationId xmlns:a16="http://schemas.microsoft.com/office/drawing/2014/main" id="{FC019D29-6AFC-87F9-48F4-E0DD664F4297}"/>
+                <a16:creationId xmlns:a16="http://schemas.microsoft.com/office/drawing/2014/main" id="{523DB90C-FB54-9A3A-D44A-35D28BED6539}"/>
               </a:ext>
             </a:extLst>
           </p:cNvPr>
@@ -12726,7 +12726,7 @@
                     <p:ext uri="{3AFAAA56-56D3-431D-BCD4-E75A35582382}">
                       <p173:tracksInfo xmlns:p173="http://schemas.microsoft.com/office/powerpoint/2017/3/main" displayLoc="slide">
                         <p173:trackLst>
-                          <p173:track id="{8ADB64ED-AA2E-40F4-B060-207A5070CF80}" label="English (captions)" lang="en-US" r:embed="rId11"/>
+                          <p173:track id="{5D188A8F-FAA6-4B11-BE0A-05674BE5AA4B}" label="English (captions)" lang="en-US" r:embed="rId11"/>
                         </p173:trackLst>
                       </p173:tracksInfo>
                     </p:ext>
@@ -12744,7 +12744,7 @@
         </p:blipFill>
         <p:spPr>
           <a:xfrm>
-            <a:off x="127000" y="6350000"/>
+            <a:off x="12446000" y="127000"/>
             <a:ext cx="304800" cy="304800"/>
           </a:xfrm>
           <a:prstGeom prst="rect">
@@ -13860,7 +13860,7 @@
             <a:hlinkClick r:id="" action="ppaction://media"/>
             <a:extLst>
               <a:ext uri="{FF2B5EF4-FFF2-40B4-BE49-F238E27FC236}">
-                <a16:creationId xmlns:a16="http://schemas.microsoft.com/office/drawing/2014/main" id="{C3EB5561-43BA-C5C6-3AD9-A48C953E5DFF}"/>
+                <a16:creationId xmlns:a16="http://schemas.microsoft.com/office/drawing/2014/main" id="{2C93C42B-A9B1-0D44-95E8-5AEFD2C65429}"/>
               </a:ext>
             </a:extLst>
           </p:cNvPr>
@@ -13876,7 +13876,7 @@
                     <p:ext uri="{3AFAAA56-56D3-431D-BCD4-E75A35582382}">
                       <p173:tracksInfo xmlns:p173="http://schemas.microsoft.com/office/powerpoint/2017/3/main" displayLoc="slide">
                         <p173:trackLst>
-                          <p173:track id="{21BE836B-DDA7-435F-9AE8-7274E422577B}" label="English (captions)" lang="en-US" r:embed="rId7"/>
+                          <p173:track id="{48F720CB-B33E-4AB1-8603-916D519F3642}" label="English (captions)" lang="en-US" r:embed="rId7"/>
                         </p173:trackLst>
                       </p173:tracksInfo>
                     </p:ext>
@@ -13894,7 +13894,7 @@
         </p:blipFill>
         <p:spPr>
           <a:xfrm>
-            <a:off x="127000" y="6350000"/>
+            <a:off x="12446000" y="127000"/>
             <a:ext cx="304800" cy="304800"/>
           </a:xfrm>
           <a:prstGeom prst="rect">
@@ -14815,7 +14815,7 @@
             <a:hlinkClick r:id="" action="ppaction://media"/>
             <a:extLst>
               <a:ext uri="{FF2B5EF4-FFF2-40B4-BE49-F238E27FC236}">
-                <a16:creationId xmlns:a16="http://schemas.microsoft.com/office/drawing/2014/main" id="{3F9A12FE-8B40-E3D9-B421-4C4328889023}"/>
+                <a16:creationId xmlns:a16="http://schemas.microsoft.com/office/drawing/2014/main" id="{F4AF3E11-F484-D750-9F9C-DD2C17B8CADC}"/>
               </a:ext>
             </a:extLst>
           </p:cNvPr>
@@ -14831,7 +14831,7 @@
                     <p:ext uri="{3AFAAA56-56D3-431D-BCD4-E75A35582382}">
                       <p173:tracksInfo xmlns:p173="http://schemas.microsoft.com/office/powerpoint/2017/3/main" displayLoc="slide">
                         <p173:trackLst>
-                          <p173:track id="{3ED48607-E368-4E9A-B77D-A74FF4F56AFA}" label="English (captions)" lang="en-US" r:embed="rId9"/>
+                          <p173:track id="{3880EC41-384F-4D47-990D-CB3B591A0042}" label="English (captions)" lang="en-US" r:embed="rId9"/>
                         </p173:trackLst>
                       </p173:tracksInfo>
                     </p:ext>
@@ -14849,7 +14849,7 @@
         </p:blipFill>
         <p:spPr>
           <a:xfrm>
-            <a:off x="127000" y="6350000"/>
+            <a:off x="12446000" y="127000"/>
             <a:ext cx="304800" cy="304800"/>
           </a:xfrm>
           <a:prstGeom prst="rect">
@@ -16006,7 +16006,7 @@
             <a:hlinkClick r:id="" action="ppaction://media"/>
             <a:extLst>
               <a:ext uri="{FF2B5EF4-FFF2-40B4-BE49-F238E27FC236}">
-                <a16:creationId xmlns:a16="http://schemas.microsoft.com/office/drawing/2014/main" id="{0306B19E-C5CF-5DDA-597F-5DDA09A1F611}"/>
+                <a16:creationId xmlns:a16="http://schemas.microsoft.com/office/drawing/2014/main" id="{5A0AD84F-F9DB-14C5-EA0E-9770126BA15F}"/>
               </a:ext>
             </a:extLst>
           </p:cNvPr>
@@ -16022,7 +16022,7 @@
                     <p:ext uri="{3AFAAA56-56D3-431D-BCD4-E75A35582382}">
                       <p173:tracksInfo xmlns:p173="http://schemas.microsoft.com/office/powerpoint/2017/3/main" displayLoc="slide">
                         <p173:trackLst>
-                          <p173:track id="{FDA599AF-E4E2-4657-B4F9-6EF6124B0D10}" label="English (captions)" lang="en-US" r:embed="rId8"/>
+                          <p173:track id="{5DCB9A86-3846-4CEC-8BB9-C8468D8CD821}" label="English (captions)" lang="en-US" r:embed="rId8"/>
                         </p173:trackLst>
                       </p173:tracksInfo>
                     </p:ext>
@@ -16040,7 +16040,7 @@
         </p:blipFill>
         <p:spPr>
           <a:xfrm>
-            <a:off x="127000" y="6350000"/>
+            <a:off x="12446000" y="127000"/>
             <a:ext cx="304800" cy="304800"/>
           </a:xfrm>
           <a:prstGeom prst="rect">
@@ -17195,7 +17195,7 @@
             <a:hlinkClick r:id="" action="ppaction://media"/>
             <a:extLst>
               <a:ext uri="{FF2B5EF4-FFF2-40B4-BE49-F238E27FC236}">
-                <a16:creationId xmlns:a16="http://schemas.microsoft.com/office/drawing/2014/main" id="{76AD265F-F74B-B603-0600-1A8347AC740E}"/>
+                <a16:creationId xmlns:a16="http://schemas.microsoft.com/office/drawing/2014/main" id="{1926153E-C109-1A04-8AA0-D3ECF31B200A}"/>
               </a:ext>
             </a:extLst>
           </p:cNvPr>
@@ -17211,7 +17211,7 @@
                     <p:ext uri="{3AFAAA56-56D3-431D-BCD4-E75A35582382}">
                       <p173:tracksInfo xmlns:p173="http://schemas.microsoft.com/office/powerpoint/2017/3/main" displayLoc="slide">
                         <p173:trackLst>
-                          <p173:track id="{94DD2CA5-6FBB-4406-8F0F-9E3AF8F37914}" label="English (captions)" lang="en-US" r:embed="rId10"/>
+                          <p173:track id="{61CAE555-8E10-4D06-9C49-C62121803842}" label="English (captions)" lang="en-US" r:embed="rId10"/>
                         </p173:trackLst>
                       </p173:tracksInfo>
                     </p:ext>
@@ -17229,7 +17229,7 @@
         </p:blipFill>
         <p:spPr>
           <a:xfrm>
-            <a:off x="127000" y="6350000"/>
+            <a:off x="12446000" y="127000"/>
             <a:ext cx="304800" cy="304800"/>
           </a:xfrm>
           <a:prstGeom prst="rect">
@@ -18721,7 +18721,7 @@
             <a:hlinkClick r:id="" action="ppaction://media"/>
             <a:extLst>
               <a:ext uri="{FF2B5EF4-FFF2-40B4-BE49-F238E27FC236}">
-                <a16:creationId xmlns:a16="http://schemas.microsoft.com/office/drawing/2014/main" id="{14767E72-CC44-94C0-7FD1-8D497A209105}"/>
+                <a16:creationId xmlns:a16="http://schemas.microsoft.com/office/drawing/2014/main" id="{1F96782A-94D7-1A38-2FDD-69CBA8187A02}"/>
               </a:ext>
             </a:extLst>
           </p:cNvPr>
@@ -18737,7 +18737,7 @@
                     <p:ext uri="{3AFAAA56-56D3-431D-BCD4-E75A35582382}">
                       <p173:tracksInfo xmlns:p173="http://schemas.microsoft.com/office/powerpoint/2017/3/main" displayLoc="slide">
                         <p173:trackLst>
-                          <p173:track id="{54ADDD8A-47B1-4073-B12B-0F87235AED96}" label="English (captions)" lang="en-US" r:embed="rId9"/>
+                          <p173:track id="{2462EDB0-0F14-47B6-8060-2E252FA1741B}" label="English (captions)" lang="en-US" r:embed="rId9"/>
                         </p173:trackLst>
                       </p173:tracksInfo>
                     </p:ext>
@@ -18755,7 +18755,7 @@
         </p:blipFill>
         <p:spPr>
           <a:xfrm>
-            <a:off x="127000" y="6350000"/>
+            <a:off x="12446000" y="127000"/>
             <a:ext cx="304800" cy="304800"/>
           </a:xfrm>
           <a:prstGeom prst="rect">
@@ -20289,7 +20289,7 @@
             <a:hlinkClick r:id="" action="ppaction://media"/>
             <a:extLst>
               <a:ext uri="{FF2B5EF4-FFF2-40B4-BE49-F238E27FC236}">
-                <a16:creationId xmlns:a16="http://schemas.microsoft.com/office/drawing/2014/main" id="{61EFB501-C356-5DCD-9419-F93FED029399}"/>
+                <a16:creationId xmlns:a16="http://schemas.microsoft.com/office/drawing/2014/main" id="{F58FFC9A-1099-3EB5-66AC-E9A12B801F1A}"/>
               </a:ext>
             </a:extLst>
           </p:cNvPr>
@@ -20305,7 +20305,7 @@
                     <p:ext uri="{3AFAAA56-56D3-431D-BCD4-E75A35582382}">
                       <p173:tracksInfo xmlns:p173="http://schemas.microsoft.com/office/powerpoint/2017/3/main" displayLoc="slide">
                         <p173:trackLst>
-                          <p173:track id="{74BD09DB-2EB1-49FA-A85B-F7F65F4C2F1B}" label="English (captions)" lang="en-US" r:embed="rId8"/>
+                          <p173:track id="{F2E848B4-38BB-4484-B0BD-3F8651EB2D9F}" label="English (captions)" lang="en-US" r:embed="rId8"/>
                         </p173:trackLst>
                       </p173:tracksInfo>
                     </p:ext>
@@ -20323,7 +20323,7 @@
         </p:blipFill>
         <p:spPr>
           <a:xfrm>
-            <a:off x="127000" y="6350000"/>
+            <a:off x="12446000" y="127000"/>
             <a:ext cx="304800" cy="304800"/>
           </a:xfrm>
           <a:prstGeom prst="rect">
@@ -21600,7 +21600,7 @@
             <a:hlinkClick r:id="" action="ppaction://media"/>
             <a:extLst>
               <a:ext uri="{FF2B5EF4-FFF2-40B4-BE49-F238E27FC236}">
-                <a16:creationId xmlns:a16="http://schemas.microsoft.com/office/drawing/2014/main" id="{DE29A79B-2107-146C-FD95-10DC3B73251B}"/>
+                <a16:creationId xmlns:a16="http://schemas.microsoft.com/office/drawing/2014/main" id="{C44A7CDA-8A10-22A9-1889-7D32B1C9360E}"/>
               </a:ext>
             </a:extLst>
           </p:cNvPr>
@@ -21616,7 +21616,7 @@
                     <p:ext uri="{3AFAAA56-56D3-431D-BCD4-E75A35582382}">
                       <p173:tracksInfo xmlns:p173="http://schemas.microsoft.com/office/powerpoint/2017/3/main" displayLoc="slide">
                         <p173:trackLst>
-                          <p173:track id="{704EA949-AD02-4EF3-B0E5-6E40DDC3C625}" label="English (captions)" lang="en-US" r:embed="rId8"/>
+                          <p173:track id="{4D3FE31C-0A94-4237-8DD5-72966932D71E}" label="English (captions)" lang="en-US" r:embed="rId8"/>
                         </p173:trackLst>
                       </p173:tracksInfo>
                     </p:ext>
@@ -21634,7 +21634,7 @@
         </p:blipFill>
         <p:spPr>
           <a:xfrm>
-            <a:off x="127000" y="6350000"/>
+            <a:off x="12446000" y="127000"/>
             <a:ext cx="304800" cy="304800"/>
           </a:xfrm>
           <a:prstGeom prst="rect">
@@ -22807,7 +22807,7 @@
             <a:hlinkClick r:id="" action="ppaction://media"/>
             <a:extLst>
               <a:ext uri="{FF2B5EF4-FFF2-40B4-BE49-F238E27FC236}">
-                <a16:creationId xmlns:a16="http://schemas.microsoft.com/office/drawing/2014/main" id="{F81CEC87-866C-EC18-8264-3285845E1D86}"/>
+                <a16:creationId xmlns:a16="http://schemas.microsoft.com/office/drawing/2014/main" id="{C03E05AE-2115-825C-E80F-66D10D9F8446}"/>
               </a:ext>
             </a:extLst>
           </p:cNvPr>
@@ -22823,7 +22823,7 @@
                     <p:ext uri="{3AFAAA56-56D3-431D-BCD4-E75A35582382}">
                       <p173:tracksInfo xmlns:p173="http://schemas.microsoft.com/office/powerpoint/2017/3/main" displayLoc="slide">
                         <p173:trackLst>
-                          <p173:track id="{02A357E6-952B-4257-8D55-E1B8C9F05B3B}" label="English (captions)" lang="en-US" r:embed="rId10"/>
+                          <p173:track id="{070C2173-C09A-4BE5-B6BE-D716C3160F31}" label="English (captions)" lang="en-US" r:embed="rId10"/>
                         </p173:trackLst>
                       </p173:tracksInfo>
                     </p:ext>
@@ -22841,7 +22841,7 @@
         </p:blipFill>
         <p:spPr>
           <a:xfrm>
-            <a:off x="127000" y="6350000"/>
+            <a:off x="12446000" y="127000"/>
             <a:ext cx="304800" cy="304800"/>
           </a:xfrm>
           <a:prstGeom prst="rect">
